--- a/РВиП/практики/Практика 4.pptx
+++ b/РВиП/практики/Практика 4.pptx
@@ -7,8 +7,12 @@
   <p:sldIdLst>
     <p:sldId id="256" r:id="rId2"/>
     <p:sldId id="257" r:id="rId3"/>
-    <p:sldId id="262" r:id="rId4"/>
-    <p:sldId id="263" r:id="rId5"/>
+    <p:sldId id="264" r:id="rId4"/>
+    <p:sldId id="262" r:id="rId5"/>
+    <p:sldId id="265" r:id="rId6"/>
+    <p:sldId id="266" r:id="rId7"/>
+    <p:sldId id="263" r:id="rId8"/>
+    <p:sldId id="267" r:id="rId9"/>
   </p:sldIdLst>
   <p:sldSz cx="9144000" cy="6858000" type="screen4x3"/>
   <p:notesSz cx="6858000" cy="9144000"/>
@@ -107,6 +111,22 @@
       </a:defRPr>
     </a:lvl9pPr>
   </p:defaultTextStyle>
+  <p:extLst>
+    <p:ext uri="{EFAFB233-063F-42B5-8137-9DF3F51BA10A}">
+      <p15:sldGuideLst xmlns:p15="http://schemas.microsoft.com/office/powerpoint/2012/main">
+        <p15:guide id="1" orient="horz" pos="2160">
+          <p15:clr>
+            <a:srgbClr val="A4A3A4"/>
+          </p15:clr>
+        </p15:guide>
+        <p15:guide id="2" pos="2880">
+          <p15:clr>
+            <a:srgbClr val="A4A3A4"/>
+          </p15:clr>
+        </p15:guide>
+      </p15:sldGuideLst>
+    </p:ext>
+  </p:extLst>
 </p:presentation>
 </file>
 
@@ -305,7 +325,7 @@
             <a:fld id="{9E1DBA9E-009E-4185-A20A-A3E4255DE3B3}" type="datetimeFigureOut">
               <a:rPr lang="ru-RU" smtClean="0"/>
               <a:pPr/>
-              <a:t>15.10.2026</a:t>
+              <a:t>16.10.2026</a:t>
             </a:fld>
             <a:endParaRPr lang="ru-RU"/>
           </a:p>
@@ -660,7 +680,7 @@
             <a:fld id="{9E1DBA9E-009E-4185-A20A-A3E4255DE3B3}" type="datetimeFigureOut">
               <a:rPr lang="ru-RU" smtClean="0"/>
               <a:pPr/>
-              <a:t>15.10.2026</a:t>
+              <a:t>16.10.2026</a:t>
             </a:fld>
             <a:endParaRPr lang="ru-RU"/>
           </a:p>
@@ -837,7 +857,7 @@
             <a:fld id="{9E1DBA9E-009E-4185-A20A-A3E4255DE3B3}" type="datetimeFigureOut">
               <a:rPr lang="ru-RU" smtClean="0"/>
               <a:pPr/>
-              <a:t>15.10.2026</a:t>
+              <a:t>16.10.2026</a:t>
             </a:fld>
             <a:endParaRPr lang="ru-RU"/>
           </a:p>
@@ -952,7 +972,7 @@
             <a:fld id="{9E1DBA9E-009E-4185-A20A-A3E4255DE3B3}" type="datetimeFigureOut">
               <a:rPr lang="ru-RU" smtClean="0"/>
               <a:pPr/>
-              <a:t>15.10.2026</a:t>
+              <a:t>16.10.2026</a:t>
             </a:fld>
             <a:endParaRPr lang="ru-RU"/>
           </a:p>
@@ -1312,7 +1332,7 @@
             <a:fld id="{9E1DBA9E-009E-4185-A20A-A3E4255DE3B3}" type="datetimeFigureOut">
               <a:rPr lang="ru-RU" smtClean="0"/>
               <a:pPr/>
-              <a:t>15.10.2026</a:t>
+              <a:t>16.10.2026</a:t>
             </a:fld>
             <a:endParaRPr lang="ru-RU"/>
           </a:p>
@@ -1579,7 +1599,7 @@
             <a:fld id="{9E1DBA9E-009E-4185-A20A-A3E4255DE3B3}" type="datetimeFigureOut">
               <a:rPr lang="ru-RU" smtClean="0"/>
               <a:pPr/>
-              <a:t>15.10.2026</a:t>
+              <a:t>16.10.2026</a:t>
             </a:fld>
             <a:endParaRPr lang="ru-RU"/>
           </a:p>
@@ -1943,7 +1963,7 @@
             <a:fld id="{9E1DBA9E-009E-4185-A20A-A3E4255DE3B3}" type="datetimeFigureOut">
               <a:rPr lang="ru-RU" smtClean="0"/>
               <a:pPr/>
-              <a:t>15.10.2026</a:t>
+              <a:t>16.10.2026</a:t>
             </a:fld>
             <a:endParaRPr lang="ru-RU"/>
           </a:p>
@@ -2172,7 +2192,7 @@
             <a:fld id="{9E1DBA9E-009E-4185-A20A-A3E4255DE3B3}" type="datetimeFigureOut">
               <a:rPr lang="ru-RU" smtClean="0"/>
               <a:pPr/>
-              <a:t>15.10.2026</a:t>
+              <a:t>16.10.2026</a:t>
             </a:fld>
             <a:endParaRPr lang="ru-RU"/>
           </a:p>
@@ -2264,7 +2284,7 @@
             <a:fld id="{9E1DBA9E-009E-4185-A20A-A3E4255DE3B3}" type="datetimeFigureOut">
               <a:rPr lang="ru-RU" smtClean="0"/>
               <a:pPr/>
-              <a:t>15.10.2026</a:t>
+              <a:t>16.10.2026</a:t>
             </a:fld>
             <a:endParaRPr lang="ru-RU"/>
           </a:p>
@@ -2533,7 +2553,7 @@
             <a:fld id="{9E1DBA9E-009E-4185-A20A-A3E4255DE3B3}" type="datetimeFigureOut">
               <a:rPr lang="ru-RU" smtClean="0"/>
               <a:pPr/>
-              <a:t>15.10.2026</a:t>
+              <a:t>16.10.2026</a:t>
             </a:fld>
             <a:endParaRPr lang="ru-RU"/>
           </a:p>
@@ -2763,7 +2783,7 @@
             <a:fld id="{9E1DBA9E-009E-4185-A20A-A3E4255DE3B3}" type="datetimeFigureOut">
               <a:rPr lang="ru-RU" smtClean="0"/>
               <a:pPr/>
-              <a:t>15.10.2026</a:t>
+              <a:t>16.10.2026</a:t>
             </a:fld>
             <a:endParaRPr lang="ru-RU"/>
           </a:p>
@@ -3264,7 +3284,7 @@
             <a:fld id="{9E1DBA9E-009E-4185-A20A-A3E4255DE3B3}" type="datetimeFigureOut">
               <a:rPr lang="ru-RU" smtClean="0"/>
               <a:pPr/>
-              <a:t>15.10.2026</a:t>
+              <a:t>16.10.2026</a:t>
             </a:fld>
             <a:endParaRPr lang="ru-RU"/>
           </a:p>
@@ -3820,83 +3840,18 @@
       </p:grpSpPr>
       <p:sp>
         <p:nvSpPr>
-          <p:cNvPr id="2" name="Заголовок 1"/>
-          <p:cNvSpPr>
-            <a:spLocks noGrp="1"/>
-          </p:cNvSpPr>
-          <p:nvPr>
-            <p:ph type="title"/>
-          </p:nvPr>
-        </p:nvSpPr>
-        <p:spPr>
-          <a:xfrm>
-            <a:off x="928662" y="-357214"/>
-            <a:ext cx="7772400" cy="1143000"/>
-          </a:xfrm>
-        </p:spPr>
-        <p:txBody>
-          <a:bodyPr/>
-          <a:lstStyle/>
-          <a:p>
-            <a:pPr algn="ctr"/>
-            <a:r>
-              <a:rPr lang="en-US" dirty="0" smtClean="0"/>
-              <a:t>SOAP</a:t>
-            </a:r>
-            <a:endParaRPr lang="ru-RU" dirty="0"/>
-          </a:p>
-        </p:txBody>
-      </p:sp>
-      <p:pic>
-        <p:nvPicPr>
-          <p:cNvPr id="3075" name="Picture 3"/>
-          <p:cNvPicPr>
-            <a:picLocks noChangeAspect="1" noChangeArrowheads="1"/>
-          </p:cNvPicPr>
+          <p:cNvPr id="2" name="Прямоугольник 1"/>
+          <p:cNvSpPr/>
           <p:nvPr/>
-        </p:nvPicPr>
-        <p:blipFill>
-          <a:blip r:embed="rId2"/>
-          <a:srcRect/>
-          <a:stretch>
-            <a:fillRect/>
-          </a:stretch>
-        </p:blipFill>
-        <p:spPr bwMode="auto">
-          <a:xfrm>
-            <a:off x="928662" y="785794"/>
-            <a:ext cx="7417528" cy="1571636"/>
+        </p:nvSpPr>
+        <p:spPr>
+          <a:xfrm>
+            <a:off x="0" y="260648"/>
+            <a:ext cx="9144000" cy="6324808"/>
           </a:xfrm>
           <a:prstGeom prst="rect">
             <a:avLst/>
           </a:prstGeom>
-          <a:noFill/>
-          <a:ln w="9525">
-            <a:noFill/>
-            <a:miter lim="800000"/>
-            <a:headEnd/>
-            <a:tailEnd/>
-          </a:ln>
-          <a:effectLst/>
-        </p:spPr>
-      </p:pic>
-      <p:sp>
-        <p:nvSpPr>
-          <p:cNvPr id="8" name="Прямоугольник 7"/>
-          <p:cNvSpPr/>
-          <p:nvPr/>
-        </p:nvSpPr>
-        <p:spPr>
-          <a:xfrm>
-            <a:off x="2000232" y="2285992"/>
-            <a:ext cx="5000660" cy="369332"/>
-          </a:xfrm>
-          <a:prstGeom prst="rect">
-            <a:avLst/>
-          </a:prstGeom>
-          <a:solidFill>
-            <a:schemeClr val="bg2"/>
-          </a:solidFill>
         </p:spPr>
         <p:txBody>
           <a:bodyPr wrap="square">
@@ -3904,86 +3859,189 @@
           </a:bodyPr>
           <a:lstStyle/>
           <a:p>
-            <a:pPr algn="ctr"/>
-            <a:r>
-              <a:rPr lang="ru-RU" dirty="0" smtClean="0"/>
-              <a:t>Подключение к ресурсу</a:t>
-            </a:r>
-            <a:endParaRPr lang="ru-RU" dirty="0"/>
-          </a:p>
-        </p:txBody>
-      </p:sp>
-      <p:pic>
-        <p:nvPicPr>
-          <p:cNvPr id="3076" name="Picture 4"/>
-          <p:cNvPicPr>
-            <a:picLocks noChangeAspect="1" noChangeArrowheads="1"/>
-          </p:cNvPicPr>
-          <p:nvPr/>
-        </p:nvPicPr>
-        <p:blipFill>
-          <a:blip r:embed="rId3"/>
-          <a:srcRect/>
-          <a:stretch>
-            <a:fillRect/>
-          </a:stretch>
-        </p:blipFill>
-        <p:spPr bwMode="auto">
-          <a:xfrm>
-            <a:off x="642910" y="3571876"/>
-            <a:ext cx="7937556" cy="714380"/>
-          </a:xfrm>
-          <a:prstGeom prst="rect">
-            <a:avLst/>
-          </a:prstGeom>
-          <a:noFill/>
-          <a:ln w="9525">
-            <a:noFill/>
-            <a:miter lim="800000"/>
-            <a:headEnd/>
-            <a:tailEnd/>
-          </a:ln>
-          <a:effectLst/>
-        </p:spPr>
-      </p:pic>
-      <p:sp>
-        <p:nvSpPr>
-          <p:cNvPr id="10" name="Прямоугольник 9"/>
-          <p:cNvSpPr/>
-          <p:nvPr/>
-        </p:nvSpPr>
-        <p:spPr>
-          <a:xfrm>
-            <a:off x="2039920" y="4357694"/>
-            <a:ext cx="5000660" cy="369332"/>
-          </a:xfrm>
-          <a:prstGeom prst="rect">
-            <a:avLst/>
-          </a:prstGeom>
-          <a:solidFill>
-            <a:schemeClr val="bg2"/>
-          </a:solidFill>
-        </p:spPr>
-        <p:txBody>
-          <a:bodyPr wrap="square">
-            <a:spAutoFit/>
-          </a:bodyPr>
-          <a:lstStyle/>
-          <a:p>
-            <a:pPr algn="ctr"/>
-            <a:r>
-              <a:rPr lang="ru-RU" dirty="0" smtClean="0"/>
-              <a:t>Вызов функции </a:t>
-            </a:r>
-            <a:r>
-              <a:rPr lang="ru-RU" dirty="0" err="1" smtClean="0"/>
-              <a:t>веб-сервиса</a:t>
-            </a:r>
-            <a:endParaRPr lang="ru-RU" dirty="0"/>
+            <a:pPr algn="just"/>
+            <a:r>
+              <a:rPr lang="ru-RU" sz="1500" dirty="0"/>
+              <a:t>Распределённые вычисления подразумевают, что часть логики или данных находится не в локальной программе, а на удалённом сервере, а приложение запрашивает их по сети. Веб‑сервис — это интерфейс, который предоставляет сервер для внешнего использования: он принимает запросы, выполняет операции и возвращает результат. В контексте задания веб‑сервис ЦБ РФ выступает как удалённый источник актуальных финансовых данных, а локальная программа на </a:t>
+            </a:r>
+            <a:r>
+              <a:rPr lang="ru-RU" sz="1500" dirty="0" err="1"/>
+              <a:t>Python</a:t>
+            </a:r>
+            <a:r>
+              <a:rPr lang="ru-RU" sz="1500" dirty="0"/>
+              <a:t> — как клиент, который эти данные запрашивает и обрабатывает.</a:t>
+            </a:r>
+          </a:p>
+          <a:p>
+            <a:pPr algn="just"/>
+            <a:r>
+              <a:rPr lang="ru-RU" sz="1500" dirty="0"/>
+              <a:t>SOAP (</a:t>
+            </a:r>
+            <a:r>
+              <a:rPr lang="ru-RU" sz="1500" dirty="0" err="1"/>
+              <a:t>Simple</a:t>
+            </a:r>
+            <a:r>
+              <a:rPr lang="ru-RU" sz="1500" dirty="0"/>
+              <a:t> </a:t>
+            </a:r>
+            <a:r>
+              <a:rPr lang="ru-RU" sz="1500" dirty="0" err="1"/>
+              <a:t>Object</a:t>
+            </a:r>
+            <a:r>
+              <a:rPr lang="ru-RU" sz="1500" dirty="0"/>
+              <a:t> </a:t>
+            </a:r>
+            <a:r>
+              <a:rPr lang="ru-RU" sz="1500" dirty="0" err="1"/>
+              <a:t>Access</a:t>
+            </a:r>
+            <a:r>
+              <a:rPr lang="ru-RU" sz="1500" dirty="0"/>
+              <a:t> </a:t>
+            </a:r>
+            <a:r>
+              <a:rPr lang="ru-RU" sz="1500" dirty="0" err="1"/>
+              <a:t>Protocol</a:t>
+            </a:r>
+            <a:r>
+              <a:rPr lang="ru-RU" sz="1500" dirty="0"/>
+              <a:t>) — это протокол обмена структурированными сообщениями (обычно в формате XML) для вызова удалённых процедур. В отличие от более простого REST, SOAP строго регламентирует формат запроса и ответа, что удобно в корпоративной и финансовой среде. WSDL (</a:t>
+            </a:r>
+            <a:r>
+              <a:rPr lang="ru-RU" sz="1500" dirty="0" err="1"/>
+              <a:t>Web</a:t>
+            </a:r>
+            <a:r>
+              <a:rPr lang="ru-RU" sz="1500" dirty="0"/>
+              <a:t> </a:t>
+            </a:r>
+            <a:r>
+              <a:rPr lang="ru-RU" sz="1500" dirty="0" err="1"/>
+              <a:t>Services</a:t>
+            </a:r>
+            <a:r>
+              <a:rPr lang="ru-RU" sz="1500" dirty="0"/>
+              <a:t> </a:t>
+            </a:r>
+            <a:r>
+              <a:rPr lang="ru-RU" sz="1500" dirty="0" err="1"/>
+              <a:t>Description</a:t>
+            </a:r>
+            <a:r>
+              <a:rPr lang="ru-RU" sz="1500" dirty="0"/>
+              <a:t> </a:t>
+            </a:r>
+            <a:r>
+              <a:rPr lang="ru-RU" sz="1500" dirty="0" err="1"/>
+              <a:t>Language</a:t>
+            </a:r>
+            <a:r>
+              <a:rPr lang="ru-RU" sz="1500" dirty="0"/>
+              <a:t>) — это XML‑документ, который описывает интерфейс сервиса: какие операции доступны, какие параметры они принимают и какие типы данных возвращают. По WSDL‑адресу библиотека </a:t>
+            </a:r>
+            <a:r>
+              <a:rPr lang="ru-RU" sz="1500" dirty="0" err="1"/>
+              <a:t>zeep</a:t>
+            </a:r>
+            <a:r>
+              <a:rPr lang="ru-RU" sz="1500" dirty="0"/>
+              <a:t> автоматически строит клиентский код, позволяя обращаться к методам сервиса как к обычным функциям </a:t>
+            </a:r>
+            <a:r>
+              <a:rPr lang="ru-RU" sz="1500" dirty="0" err="1"/>
+              <a:t>Python</a:t>
+            </a:r>
+            <a:r>
+              <a:rPr lang="ru-RU" sz="1500" dirty="0"/>
+              <a:t>.</a:t>
+            </a:r>
+          </a:p>
+          <a:p>
+            <a:pPr algn="just"/>
+            <a:r>
+              <a:rPr lang="ru-RU" sz="1500" dirty="0" err="1"/>
+              <a:t>Zeep</a:t>
+            </a:r>
+            <a:r>
+              <a:rPr lang="ru-RU" sz="1500" dirty="0"/>
+              <a:t> — это современный SOAP‑клиент для </a:t>
+            </a:r>
+            <a:r>
+              <a:rPr lang="ru-RU" sz="1500" dirty="0" err="1"/>
+              <a:t>Python</a:t>
+            </a:r>
+            <a:r>
+              <a:rPr lang="ru-RU" sz="1500" dirty="0"/>
+              <a:t>, который упрощает работу с WSDL: он берёт на себя формирование SOAP‑запросов, отправку по HTTP, разбор XML‑ответа и преобразование его в удобные </a:t>
+            </a:r>
+            <a:r>
+              <a:rPr lang="ru-RU" sz="1500" dirty="0" err="1"/>
+              <a:t>Python</a:t>
+            </a:r>
+            <a:r>
+              <a:rPr lang="ru-RU" sz="1500" dirty="0"/>
+              <a:t>‑объекты. Поскольку SOAP возвращает сложные вложенные структуры, </a:t>
+            </a:r>
+            <a:r>
+              <a:rPr lang="ru-RU" sz="1500" dirty="0" err="1"/>
+              <a:t>zeep</a:t>
+            </a:r>
+            <a:r>
+              <a:rPr lang="ru-RU" sz="1500" dirty="0"/>
+              <a:t> предоставляет вспомогательные утилиты (например, </a:t>
+            </a:r>
+            <a:r>
+              <a:rPr lang="ru-RU" sz="1500" dirty="0" err="1"/>
+              <a:t>zeep.helpers.serialize_object</a:t>
+            </a:r>
+            <a:r>
+              <a:rPr lang="ru-RU" sz="1500" dirty="0"/>
+              <a:t>), которые превращают эти структуры в обычные словари и списки. Это позволяет работать с данными привычными средствами языка, не разбирая вручную XML.</a:t>
+            </a:r>
+          </a:p>
+          <a:p>
+            <a:pPr algn="just"/>
+            <a:r>
+              <a:rPr lang="ru-RU" sz="1500" dirty="0"/>
+              <a:t>В распределённых приложениях важно корректно передавать и интерпретировать даты: сервер может ожидать конкретный формат или тип данных, а клиент должен использовать системные средства для получения актуальной даты. В </a:t>
+            </a:r>
+            <a:r>
+              <a:rPr lang="ru-RU" sz="1500" dirty="0" err="1"/>
+              <a:t>Python</a:t>
+            </a:r>
+            <a:r>
+              <a:rPr lang="ru-RU" sz="1500" dirty="0"/>
+              <a:t> модуль </a:t>
+            </a:r>
+            <a:r>
+              <a:rPr lang="ru-RU" sz="1500" dirty="0" err="1"/>
+              <a:t>datetime</a:t>
+            </a:r>
+            <a:r>
+              <a:rPr lang="ru-RU" sz="1500" dirty="0"/>
+              <a:t> даёт инструменты для работы с текущим временем и форматированием. При вызове методов веб‑сервиса дата часто передаётся как объект </a:t>
+            </a:r>
+            <a:r>
+              <a:rPr lang="ru-RU" sz="1500" dirty="0" err="1"/>
+              <a:t>datetime</a:t>
+            </a:r>
+            <a:r>
+              <a:rPr lang="ru-RU" sz="1500" dirty="0"/>
+              <a:t> или строка в определённом формате — это зависит от описания в WSDL. Кроме того, методы сервиса могут возвращать дату публикации данных или момент последнего обновления, и тогда задача клиента — извлечь из этой информации нужные компоненты (год, месяц, день) с помощью строковых или дата‑функций.</a:t>
+            </a:r>
           </a:p>
         </p:txBody>
       </p:sp>
     </p:spTree>
+    <p:extLst>
+      <p:ext uri="{BB962C8B-B14F-4D97-AF65-F5344CB8AC3E}">
+        <p14:creationId xmlns:p14="http://schemas.microsoft.com/office/powerpoint/2010/main" val="969615608"/>
+      </p:ext>
+    </p:extLst>
   </p:cSld>
   <p:clrMapOvr>
     <a:masterClrMapping/>
@@ -4020,6 +4078,486 @@
         </p:nvSpPr>
         <p:spPr>
           <a:xfrm>
+            <a:off x="928662" y="-357214"/>
+            <a:ext cx="7772400" cy="1143000"/>
+          </a:xfrm>
+        </p:spPr>
+        <p:txBody>
+          <a:bodyPr/>
+          <a:lstStyle/>
+          <a:p>
+            <a:pPr algn="ctr"/>
+            <a:r>
+              <a:rPr lang="en-US" dirty="0" smtClean="0"/>
+              <a:t>SOAP</a:t>
+            </a:r>
+            <a:endParaRPr lang="ru-RU" dirty="0"/>
+          </a:p>
+        </p:txBody>
+      </p:sp>
+      <p:pic>
+        <p:nvPicPr>
+          <p:cNvPr id="3075" name="Picture 3"/>
+          <p:cNvPicPr>
+            <a:picLocks noChangeAspect="1" noChangeArrowheads="1"/>
+          </p:cNvPicPr>
+          <p:nvPr/>
+        </p:nvPicPr>
+        <p:blipFill>
+          <a:blip r:embed="rId2"/>
+          <a:srcRect/>
+          <a:stretch>
+            <a:fillRect/>
+          </a:stretch>
+        </p:blipFill>
+        <p:spPr bwMode="auto">
+          <a:xfrm>
+            <a:off x="928662" y="785794"/>
+            <a:ext cx="7417528" cy="1571636"/>
+          </a:xfrm>
+          <a:prstGeom prst="rect">
+            <a:avLst/>
+          </a:prstGeom>
+          <a:noFill/>
+          <a:ln w="9525">
+            <a:noFill/>
+            <a:miter lim="800000"/>
+            <a:headEnd/>
+            <a:tailEnd/>
+          </a:ln>
+          <a:effectLst/>
+        </p:spPr>
+      </p:pic>
+      <p:sp>
+        <p:nvSpPr>
+          <p:cNvPr id="8" name="Прямоугольник 7"/>
+          <p:cNvSpPr/>
+          <p:nvPr/>
+        </p:nvSpPr>
+        <p:spPr>
+          <a:xfrm>
+            <a:off x="2000232" y="2285992"/>
+            <a:ext cx="5000660" cy="369332"/>
+          </a:xfrm>
+          <a:prstGeom prst="rect">
+            <a:avLst/>
+          </a:prstGeom>
+          <a:solidFill>
+            <a:schemeClr val="bg2"/>
+          </a:solidFill>
+        </p:spPr>
+        <p:txBody>
+          <a:bodyPr wrap="square">
+            <a:spAutoFit/>
+          </a:bodyPr>
+          <a:lstStyle/>
+          <a:p>
+            <a:pPr algn="ctr"/>
+            <a:r>
+              <a:rPr lang="ru-RU" dirty="0" smtClean="0"/>
+              <a:t>Подключение к ресурсу</a:t>
+            </a:r>
+            <a:endParaRPr lang="ru-RU" dirty="0"/>
+          </a:p>
+        </p:txBody>
+      </p:sp>
+      <p:pic>
+        <p:nvPicPr>
+          <p:cNvPr id="3076" name="Picture 4"/>
+          <p:cNvPicPr>
+            <a:picLocks noChangeAspect="1" noChangeArrowheads="1"/>
+          </p:cNvPicPr>
+          <p:nvPr/>
+        </p:nvPicPr>
+        <p:blipFill>
+          <a:blip r:embed="rId3"/>
+          <a:srcRect/>
+          <a:stretch>
+            <a:fillRect/>
+          </a:stretch>
+        </p:blipFill>
+        <p:spPr bwMode="auto">
+          <a:xfrm>
+            <a:off x="642910" y="3571876"/>
+            <a:ext cx="7937556" cy="714380"/>
+          </a:xfrm>
+          <a:prstGeom prst="rect">
+            <a:avLst/>
+          </a:prstGeom>
+          <a:noFill/>
+          <a:ln w="9525">
+            <a:noFill/>
+            <a:miter lim="800000"/>
+            <a:headEnd/>
+            <a:tailEnd/>
+          </a:ln>
+          <a:effectLst/>
+        </p:spPr>
+      </p:pic>
+      <p:sp>
+        <p:nvSpPr>
+          <p:cNvPr id="10" name="Прямоугольник 9"/>
+          <p:cNvSpPr/>
+          <p:nvPr/>
+        </p:nvSpPr>
+        <p:spPr>
+          <a:xfrm>
+            <a:off x="2039920" y="4357694"/>
+            <a:ext cx="5000660" cy="369332"/>
+          </a:xfrm>
+          <a:prstGeom prst="rect">
+            <a:avLst/>
+          </a:prstGeom>
+          <a:solidFill>
+            <a:schemeClr val="bg2"/>
+          </a:solidFill>
+        </p:spPr>
+        <p:txBody>
+          <a:bodyPr wrap="square">
+            <a:spAutoFit/>
+          </a:bodyPr>
+          <a:lstStyle/>
+          <a:p>
+            <a:pPr algn="ctr"/>
+            <a:r>
+              <a:rPr lang="ru-RU" dirty="0" smtClean="0"/>
+              <a:t>Вызов функции </a:t>
+            </a:r>
+            <a:r>
+              <a:rPr lang="ru-RU" dirty="0" err="1" smtClean="0"/>
+              <a:t>веб-сервиса</a:t>
+            </a:r>
+            <a:endParaRPr lang="ru-RU" dirty="0"/>
+          </a:p>
+        </p:txBody>
+      </p:sp>
+    </p:spTree>
+  </p:cSld>
+  <p:clrMapOvr>
+    <a:masterClrMapping/>
+  </p:clrMapOvr>
+</p:sld>
+</file>
+
+<file path=ppt/slides/slide5.xml><?xml version="1.0" encoding="utf-8"?>
+<p:sld xmlns:a="http://schemas.openxmlformats.org/drawingml/2006/main" xmlns:r="http://schemas.openxmlformats.org/officeDocument/2006/relationships" xmlns:p="http://schemas.openxmlformats.org/presentationml/2006/main">
+  <p:cSld>
+    <p:spTree>
+      <p:nvGrpSpPr>
+        <p:cNvPr id="1" name=""/>
+        <p:cNvGrpSpPr/>
+        <p:nvPr/>
+      </p:nvGrpSpPr>
+      <p:grpSpPr>
+        <a:xfrm>
+          <a:off x="0" y="0"/>
+          <a:ext cx="0" cy="0"/>
+          <a:chOff x="0" y="0"/>
+          <a:chExt cx="0" cy="0"/>
+        </a:xfrm>
+      </p:grpSpPr>
+      <p:sp>
+        <p:nvSpPr>
+          <p:cNvPr id="2" name="Прямоугольник 1"/>
+          <p:cNvSpPr/>
+          <p:nvPr/>
+        </p:nvSpPr>
+        <p:spPr>
+          <a:xfrm>
+            <a:off x="0" y="260648"/>
+            <a:ext cx="9144000" cy="5755422"/>
+          </a:xfrm>
+          <a:prstGeom prst="rect">
+            <a:avLst/>
+          </a:prstGeom>
+        </p:spPr>
+        <p:txBody>
+          <a:bodyPr wrap="square">
+            <a:spAutoFit/>
+          </a:bodyPr>
+          <a:lstStyle/>
+          <a:p>
+            <a:pPr algn="just"/>
+            <a:r>
+              <a:rPr lang="ru-RU" sz="1600" dirty="0"/>
+              <a:t>SOAP‑сервис — это серверная программа, которая принимает XML‑запросы по HTTP, выполняет бизнес‑логику и возвращает XML‑ответ по правилам протокола. В отличие от REST, где акцент на ресурсах и HTTP‑глаголах, в SOAP вся логика инкапсулирована в операциях (методах), а контракт сервиса задаётся WSDL. Для создания такого сервиса в </a:t>
+            </a:r>
+            <a:r>
+              <a:rPr lang="ru-RU" sz="1600" dirty="0" err="1"/>
+              <a:t>Python</a:t>
+            </a:r>
+            <a:r>
+              <a:rPr lang="ru-RU" sz="1600" dirty="0"/>
+              <a:t> удобно использовать библиотеку </a:t>
+            </a:r>
+            <a:r>
+              <a:rPr lang="ru-RU" sz="1600" dirty="0" err="1"/>
+              <a:t>Spyne</a:t>
+            </a:r>
+            <a:r>
+              <a:rPr lang="ru-RU" sz="1600" dirty="0"/>
+              <a:t>: она позволяет описать типы данных и методы как обычные классы и функции, а сама берёт на себя </a:t>
+            </a:r>
+            <a:r>
+              <a:rPr lang="ru-RU" sz="1600" dirty="0" err="1"/>
+              <a:t>сериализацию</a:t>
+            </a:r>
+            <a:r>
+              <a:rPr lang="ru-RU" sz="1600" dirty="0"/>
+              <a:t> в XML, обработку запросов и генерацию WSDL.</a:t>
+            </a:r>
+          </a:p>
+          <a:p>
+            <a:pPr algn="just"/>
+            <a:r>
+              <a:rPr lang="ru-RU" sz="1600" dirty="0"/>
+              <a:t>В </a:t>
+            </a:r>
+            <a:r>
+              <a:rPr lang="ru-RU" sz="1600" dirty="0" err="1"/>
+              <a:t>Spyne</a:t>
+            </a:r>
+            <a:r>
+              <a:rPr lang="ru-RU" sz="1600" dirty="0"/>
+              <a:t> сервис строится вокруг класса, наследуемого от </a:t>
+            </a:r>
+            <a:r>
+              <a:rPr lang="ru-RU" sz="1600" dirty="0" err="1"/>
+              <a:t>ServiceBase</a:t>
+            </a:r>
+            <a:r>
+              <a:rPr lang="ru-RU" sz="1600" dirty="0"/>
+              <a:t>, где каждый публичный метод становится SOAP‑операцией. Типы данных (строки, числа, списки, сложные объекты) описываются через типы </a:t>
+            </a:r>
+            <a:r>
+              <a:rPr lang="ru-RU" sz="1600" dirty="0" err="1"/>
+              <a:t>Spyne</a:t>
+            </a:r>
+            <a:r>
+              <a:rPr lang="ru-RU" sz="1600" dirty="0"/>
+              <a:t> (</a:t>
+            </a:r>
+            <a:r>
+              <a:rPr lang="ru-RU" sz="1600" dirty="0" err="1"/>
+              <a:t>Unicode</a:t>
+            </a:r>
+            <a:r>
+              <a:rPr lang="ru-RU" sz="1600" dirty="0"/>
+              <a:t>, </a:t>
+            </a:r>
+            <a:r>
+              <a:rPr lang="ru-RU" sz="1600" dirty="0" err="1"/>
+              <a:t>Integer</a:t>
+            </a:r>
+            <a:r>
+              <a:rPr lang="ru-RU" sz="1600" dirty="0"/>
+              <a:t>, </a:t>
+            </a:r>
+            <a:r>
+              <a:rPr lang="ru-RU" sz="1600" dirty="0" err="1"/>
+              <a:t>Array</a:t>
+            </a:r>
+            <a:r>
+              <a:rPr lang="ru-RU" sz="1600" dirty="0"/>
+              <a:t> и т. д.) — это нужно, чтобы библиотека могла корректно строить XML и </a:t>
+            </a:r>
+            <a:r>
+              <a:rPr lang="ru-RU" sz="1600" dirty="0" err="1"/>
+              <a:t>валидировать</a:t>
+            </a:r>
+            <a:r>
+              <a:rPr lang="ru-RU" sz="1600" dirty="0"/>
+              <a:t> входящие данные. WSDL генерируется автоматически по адресу вида /</a:t>
+            </a:r>
+            <a:r>
+              <a:rPr lang="ru-RU" sz="1600" dirty="0" err="1"/>
+              <a:t>soap</a:t>
+            </a:r>
+            <a:r>
+              <a:rPr lang="ru-RU" sz="1600" dirty="0"/>
+              <a:t> (или как настроено), и именно по нему клиенты (например, </a:t>
+            </a:r>
+            <a:r>
+              <a:rPr lang="ru-RU" sz="1600" dirty="0" err="1"/>
+              <a:t>Zeep</a:t>
+            </a:r>
+            <a:r>
+              <a:rPr lang="ru-RU" sz="1600" dirty="0"/>
+              <a:t>) узнают, какие методы доступны и в каком формате их вызывать.</a:t>
+            </a:r>
+          </a:p>
+          <a:p>
+            <a:pPr algn="just"/>
+            <a:r>
+              <a:rPr lang="ru-RU" sz="1600" dirty="0"/>
+              <a:t>Браузер не «понимает» SOAP напрямую, но он может отобразить WSDL как XML‑документ и показать страницу с описанием сервиса. Часто </a:t>
+            </a:r>
+            <a:r>
+              <a:rPr lang="ru-RU" sz="1600" dirty="0" err="1"/>
+              <a:t>фреймворки</a:t>
+            </a:r>
+            <a:r>
+              <a:rPr lang="ru-RU" sz="1600" dirty="0"/>
+              <a:t> добавляют простую HTML‑страницу с перечнем методов и ссылками на тестовые вызовы или на сам WSDL. Таким образом, через браузер можно визуально проверить, что сервис запущен, увидеть доступные операции и структуру WSDL, а иногда — сделать тестовый запрос в упрощённом виде. Это полезно для быстрой диагностики и демонстрации.</a:t>
+            </a:r>
+          </a:p>
+          <a:p>
+            <a:pPr algn="just"/>
+            <a:r>
+              <a:rPr lang="ru-RU" sz="1600" dirty="0" err="1"/>
+              <a:t>Zeep</a:t>
+            </a:r>
+            <a:r>
+              <a:rPr lang="ru-RU" sz="1600" dirty="0"/>
+              <a:t> выступает в роли SOAP‑клиента: по WSDL‑адресу он строит </a:t>
+            </a:r>
+            <a:r>
+              <a:rPr lang="ru-RU" sz="1600" dirty="0" err="1"/>
+              <a:t>Python</a:t>
+            </a:r>
+            <a:r>
+              <a:rPr lang="ru-RU" sz="1600" dirty="0"/>
+              <a:t>‑интерфейс к сервису, превращая удалённые методы в локальные функции. При вызове </a:t>
+            </a:r>
+            <a:r>
+              <a:rPr lang="ru-RU" sz="1600" dirty="0" err="1"/>
+              <a:t>Zeep</a:t>
+            </a:r>
+            <a:r>
+              <a:rPr lang="ru-RU" sz="1600" dirty="0"/>
+              <a:t> формирует правильный SOAP‑запрос (с обёртками </a:t>
+            </a:r>
+            <a:r>
+              <a:rPr lang="ru-RU" sz="1600" dirty="0" err="1"/>
+              <a:t>Envelope</a:t>
+            </a:r>
+            <a:r>
+              <a:rPr lang="ru-RU" sz="1600" dirty="0"/>
+              <a:t>, </a:t>
+            </a:r>
+            <a:r>
+              <a:rPr lang="ru-RU" sz="1600" dirty="0" err="1"/>
+              <a:t>Header</a:t>
+            </a:r>
+            <a:r>
+              <a:rPr lang="ru-RU" sz="1600" dirty="0"/>
+              <a:t>, </a:t>
+            </a:r>
+            <a:r>
+              <a:rPr lang="ru-RU" sz="1600" dirty="0" err="1"/>
+              <a:t>Body</a:t>
+            </a:r>
+            <a:r>
+              <a:rPr lang="ru-RU" sz="1600" dirty="0"/>
+              <a:t>), отправляет его по HTTP и разбирает ответ в удобные </a:t>
+            </a:r>
+            <a:r>
+              <a:rPr lang="ru-RU" sz="1600" dirty="0" err="1"/>
+              <a:t>Python</a:t>
+            </a:r>
+            <a:r>
+              <a:rPr lang="ru-RU" sz="1600" dirty="0"/>
+              <a:t>‑объекты. Такой подход позволяет писать клиентский код почти так же, как при работе с обычными функциями, скрывая сложность XML и протокола SOAP.</a:t>
+            </a:r>
+          </a:p>
+        </p:txBody>
+      </p:sp>
+    </p:spTree>
+    <p:extLst>
+      <p:ext uri="{BB962C8B-B14F-4D97-AF65-F5344CB8AC3E}">
+        <p14:creationId xmlns:p14="http://schemas.microsoft.com/office/powerpoint/2010/main" val="1832736416"/>
+      </p:ext>
+    </p:extLst>
+  </p:cSld>
+  <p:clrMapOvr>
+    <a:masterClrMapping/>
+  </p:clrMapOvr>
+</p:sld>
+</file>
+
+<file path=ppt/slides/slide6.xml><?xml version="1.0" encoding="utf-8"?>
+<p:sld xmlns:a="http://schemas.openxmlformats.org/drawingml/2006/main" xmlns:r="http://schemas.openxmlformats.org/officeDocument/2006/relationships" xmlns:p="http://schemas.openxmlformats.org/presentationml/2006/main">
+  <p:cSld>
+    <p:spTree>
+      <p:nvGrpSpPr>
+        <p:cNvPr id="1" name=""/>
+        <p:cNvGrpSpPr/>
+        <p:nvPr/>
+      </p:nvGrpSpPr>
+      <p:grpSpPr>
+        <a:xfrm>
+          <a:off x="0" y="0"/>
+          <a:ext cx="0" cy="0"/>
+          <a:chOff x="0" y="0"/>
+          <a:chExt cx="0" cy="0"/>
+        </a:xfrm>
+      </p:grpSpPr>
+      <p:pic>
+        <p:nvPicPr>
+          <p:cNvPr id="3" name="Рисунок 2"/>
+          <p:cNvPicPr>
+            <a:picLocks noChangeAspect="1"/>
+          </p:cNvPicPr>
+          <p:nvPr/>
+        </p:nvPicPr>
+        <p:blipFill>
+          <a:blip r:embed="rId2"/>
+          <a:stretch>
+            <a:fillRect/>
+          </a:stretch>
+        </p:blipFill>
+        <p:spPr>
+          <a:xfrm>
+            <a:off x="738187" y="595312"/>
+            <a:ext cx="7667625" cy="5667375"/>
+          </a:xfrm>
+          <a:prstGeom prst="rect">
+            <a:avLst/>
+          </a:prstGeom>
+        </p:spPr>
+      </p:pic>
+    </p:spTree>
+    <p:extLst>
+      <p:ext uri="{BB962C8B-B14F-4D97-AF65-F5344CB8AC3E}">
+        <p14:creationId xmlns:p14="http://schemas.microsoft.com/office/powerpoint/2010/main" val="1024182146"/>
+      </p:ext>
+    </p:extLst>
+  </p:cSld>
+  <p:clrMapOvr>
+    <a:masterClrMapping/>
+  </p:clrMapOvr>
+</p:sld>
+</file>
+
+<file path=ppt/slides/slide7.xml><?xml version="1.0" encoding="utf-8"?>
+<p:sld xmlns:a="http://schemas.openxmlformats.org/drawingml/2006/main" xmlns:r="http://schemas.openxmlformats.org/officeDocument/2006/relationships" xmlns:p="http://schemas.openxmlformats.org/presentationml/2006/main">
+  <p:cSld>
+    <p:spTree>
+      <p:nvGrpSpPr>
+        <p:cNvPr id="1" name=""/>
+        <p:cNvGrpSpPr/>
+        <p:nvPr/>
+      </p:nvGrpSpPr>
+      <p:grpSpPr>
+        <a:xfrm>
+          <a:off x="0" y="0"/>
+          <a:ext cx="0" cy="0"/>
+          <a:chOff x="0" y="0"/>
+          <a:chExt cx="0" cy="0"/>
+        </a:xfrm>
+      </p:grpSpPr>
+      <p:sp>
+        <p:nvSpPr>
+          <p:cNvPr id="2" name="Заголовок 1"/>
+          <p:cNvSpPr>
+            <a:spLocks noGrp="1"/>
+          </p:cNvSpPr>
+          <p:nvPr>
+            <p:ph type="title"/>
+          </p:nvPr>
+        </p:nvSpPr>
+        <p:spPr>
+          <a:xfrm>
             <a:off x="0" y="-357214"/>
             <a:ext cx="9144000" cy="1143000"/>
           </a:xfrm>
@@ -4250,6 +4788,281 @@
         </p:txBody>
       </p:sp>
     </p:spTree>
+  </p:cSld>
+  <p:clrMapOvr>
+    <a:masterClrMapping/>
+  </p:clrMapOvr>
+</p:sld>
+</file>
+
+<file path=ppt/slides/slide8.xml><?xml version="1.0" encoding="utf-8"?>
+<p:sld xmlns:a="http://schemas.openxmlformats.org/drawingml/2006/main" xmlns:r="http://schemas.openxmlformats.org/officeDocument/2006/relationships" xmlns:p="http://schemas.openxmlformats.org/presentationml/2006/main">
+  <p:cSld>
+    <p:spTree>
+      <p:nvGrpSpPr>
+        <p:cNvPr id="1" name=""/>
+        <p:cNvGrpSpPr/>
+        <p:nvPr/>
+      </p:nvGrpSpPr>
+      <p:grpSpPr>
+        <a:xfrm>
+          <a:off x="0" y="0"/>
+          <a:ext cx="0" cy="0"/>
+          <a:chOff x="0" y="0"/>
+          <a:chExt cx="0" cy="0"/>
+        </a:xfrm>
+      </p:grpSpPr>
+      <p:pic>
+        <p:nvPicPr>
+          <p:cNvPr id="2" name="Рисунок 1"/>
+          <p:cNvPicPr>
+            <a:picLocks noChangeAspect="1"/>
+          </p:cNvPicPr>
+          <p:nvPr/>
+        </p:nvPicPr>
+        <p:blipFill>
+          <a:blip r:embed="rId2"/>
+          <a:stretch>
+            <a:fillRect/>
+          </a:stretch>
+        </p:blipFill>
+        <p:spPr>
+          <a:xfrm>
+            <a:off x="5220072" y="692696"/>
+            <a:ext cx="3719130" cy="4392488"/>
+          </a:xfrm>
+          <a:prstGeom prst="rect">
+            <a:avLst/>
+          </a:prstGeom>
+        </p:spPr>
+      </p:pic>
+      <p:sp>
+        <p:nvSpPr>
+          <p:cNvPr id="3" name="Прямоугольник 2"/>
+          <p:cNvSpPr/>
+          <p:nvPr/>
+        </p:nvSpPr>
+        <p:spPr>
+          <a:xfrm>
+            <a:off x="0" y="188640"/>
+            <a:ext cx="5220072" cy="6555641"/>
+          </a:xfrm>
+          <a:prstGeom prst="rect">
+            <a:avLst/>
+          </a:prstGeom>
+        </p:spPr>
+        <p:txBody>
+          <a:bodyPr wrap="square">
+            <a:spAutoFit/>
+          </a:bodyPr>
+          <a:lstStyle/>
+          <a:p>
+            <a:pPr algn="just"/>
+            <a:r>
+              <a:rPr lang="ru-RU" sz="1200" dirty="0"/>
+              <a:t>Диаграмма последовательности (</a:t>
+            </a:r>
+            <a:r>
+              <a:rPr lang="ru-RU" sz="1200" dirty="0" err="1"/>
+              <a:t>Sequence</a:t>
+            </a:r>
+            <a:r>
+              <a:rPr lang="ru-RU" sz="1200" dirty="0"/>
+              <a:t> </a:t>
+            </a:r>
+            <a:r>
+              <a:rPr lang="ru-RU" sz="1200" dirty="0" err="1"/>
+              <a:t>Diagram</a:t>
+            </a:r>
+            <a:r>
+              <a:rPr lang="ru-RU" sz="1200" dirty="0"/>
+              <a:t>) в SOA показывает временной порядок взаимодействий между сервисами и клиентом, а также передачу сообщений (запросов/ответов) по сети. Для сценария «карточка заказа» она фиксирует, как клиентский запрос превращается в цепочку вызовов между сервисами, где происходит агрегация данных и как передаются сквозные параметры (например, идентификатор транзакции) в заголовках сообщений.</a:t>
+            </a:r>
+          </a:p>
+          <a:p>
+            <a:pPr algn="just"/>
+            <a:r>
+              <a:rPr lang="ru-RU" sz="1200" dirty="0"/>
+              <a:t>Клиентское приложение инициирует запрос и ожидает итоговую карточку заказа. </a:t>
+            </a:r>
+            <a:r>
+              <a:rPr lang="ru-RU" sz="1200" dirty="0" err="1"/>
+              <a:t>OrderService</a:t>
+            </a:r>
+            <a:r>
+              <a:rPr lang="ru-RU" sz="1200" dirty="0"/>
+              <a:t> — оркестратор: он принимает запрос, вызывает </a:t>
+            </a:r>
+            <a:r>
+              <a:rPr lang="ru-RU" sz="1200" dirty="0" err="1"/>
+              <a:t>CustomerService</a:t>
+            </a:r>
+            <a:r>
+              <a:rPr lang="ru-RU" sz="1200" dirty="0"/>
+              <a:t> для получения профиля клиента и </a:t>
+            </a:r>
+            <a:r>
+              <a:rPr lang="ru-RU" sz="1200" dirty="0" err="1"/>
+              <a:t>InventoryService</a:t>
+            </a:r>
+            <a:r>
+              <a:rPr lang="ru-RU" sz="1200" dirty="0"/>
+              <a:t> для проверки остатков, затем агрегирует данные и возвращает единый ответ. </a:t>
+            </a:r>
+            <a:r>
+              <a:rPr lang="ru-RU" sz="1200" dirty="0" err="1"/>
+              <a:t>CustomerService</a:t>
+            </a:r>
+            <a:r>
+              <a:rPr lang="ru-RU" sz="1200" dirty="0"/>
+              <a:t> и </a:t>
+            </a:r>
+            <a:r>
+              <a:rPr lang="ru-RU" sz="1200" dirty="0" err="1"/>
+              <a:t>InventoryService</a:t>
+            </a:r>
+            <a:r>
+              <a:rPr lang="ru-RU" sz="1200" dirty="0"/>
+              <a:t> — специализированные сервисы, отвечающие только за свои доменные данные. Такая декомпозиция повышает масштабируемость и упрощает поддержку.</a:t>
+            </a:r>
+          </a:p>
+          <a:p>
+            <a:pPr algn="just"/>
+            <a:r>
+              <a:rPr lang="ru-RU" sz="1200" dirty="0"/>
+              <a:t>В SOAP‑сообщениях служебные данные (идентификатор транзакции, учётные данные, приоритет, время запроса) удобно выносить в заголовок (SOAP </a:t>
+            </a:r>
+            <a:r>
+              <a:rPr lang="ru-RU" sz="1200" dirty="0" err="1"/>
+              <a:t>Header</a:t>
+            </a:r>
+            <a:r>
+              <a:rPr lang="ru-RU" sz="1200" dirty="0"/>
+              <a:t>), а бизнес‑данные — в тело (SOAP </a:t>
+            </a:r>
+            <a:r>
+              <a:rPr lang="ru-RU" sz="1200" dirty="0" err="1"/>
+              <a:t>Body</a:t>
+            </a:r>
+            <a:r>
+              <a:rPr lang="ru-RU" sz="1200" dirty="0"/>
+              <a:t>). Это позволяет инфраструктуре (шлюзы, </a:t>
+            </a:r>
+            <a:r>
+              <a:rPr lang="ru-RU" sz="1200" dirty="0" err="1"/>
+              <a:t>логирование</a:t>
+            </a:r>
+            <a:r>
+              <a:rPr lang="ru-RU" sz="1200" dirty="0"/>
+              <a:t>, трассировка) обрабатывать контекст независимо от полезной нагрузки. На диаграмме это отражают как атрибуты сообщения: например, </a:t>
+            </a:r>
+            <a:r>
+              <a:rPr lang="ru-RU" sz="1200" dirty="0" err="1"/>
+              <a:t>header</a:t>
+            </a:r>
+            <a:r>
+              <a:rPr lang="ru-RU" sz="1200" dirty="0"/>
+              <a:t>: {</a:t>
+            </a:r>
+            <a:r>
+              <a:rPr lang="ru-RU" sz="1200" dirty="0" err="1"/>
+              <a:t>txnId</a:t>
+            </a:r>
+            <a:r>
+              <a:rPr lang="ru-RU" sz="1200" dirty="0"/>
+              <a:t>: "ABC123", </a:t>
+            </a:r>
+            <a:r>
+              <a:rPr lang="ru-RU" sz="1200" dirty="0" err="1"/>
+              <a:t>auth</a:t>
+            </a:r>
+            <a:r>
+              <a:rPr lang="ru-RU" sz="1200" dirty="0"/>
+              <a:t>: "</a:t>
+            </a:r>
+            <a:r>
+              <a:rPr lang="ru-RU" sz="1200" dirty="0" err="1"/>
+              <a:t>token</a:t>
+            </a:r>
+            <a:r>
+              <a:rPr lang="ru-RU" sz="1200" dirty="0"/>
+              <a:t>"}.</a:t>
+            </a:r>
+          </a:p>
+          <a:p>
+            <a:pPr algn="just"/>
+            <a:r>
+              <a:rPr lang="ru-RU" sz="1200" dirty="0" err="1"/>
+              <a:t>OrderService</a:t>
+            </a:r>
+            <a:r>
+              <a:rPr lang="ru-RU" sz="1200" dirty="0"/>
+              <a:t> выполняет роль оркестратора: получив запрос, он параллельно или последовательно вызывает зависимые сервисы, обрабатывает их ответы, проверяет согласованность данных (например, что товар действительно есть в наличии), формирует итоговую структуру «карточка заказа» и возвращает её клиенту. Такой подход скрывает сложность распределённой системы от клиента.</a:t>
+            </a:r>
+          </a:p>
+          <a:p>
+            <a:pPr algn="just"/>
+            <a:r>
+              <a:rPr lang="ru-RU" sz="1200" dirty="0"/>
+              <a:t>Если один из сервисов (</a:t>
+            </a:r>
+            <a:r>
+              <a:rPr lang="ru-RU" sz="1200" dirty="0" err="1"/>
+              <a:t>CustomerService</a:t>
+            </a:r>
+            <a:r>
+              <a:rPr lang="ru-RU" sz="1200" dirty="0"/>
+              <a:t> или </a:t>
+            </a:r>
+            <a:r>
+              <a:rPr lang="ru-RU" sz="1200" dirty="0" err="1"/>
+              <a:t>InventoryService</a:t>
+            </a:r>
+            <a:r>
+              <a:rPr lang="ru-RU" sz="1200" dirty="0"/>
+              <a:t>) не отвечает или возвращает ошибку, </a:t>
+            </a:r>
+            <a:r>
+              <a:rPr lang="ru-RU" sz="1200" dirty="0" err="1"/>
+              <a:t>OrderService</a:t>
+            </a:r>
+            <a:r>
+              <a:rPr lang="ru-RU" sz="1200" dirty="0"/>
+              <a:t> должен корректно обработать ситуацию: вернуть клиенту понятный код ошибки, </a:t>
+            </a:r>
+            <a:r>
+              <a:rPr lang="ru-RU" sz="1200" dirty="0" err="1"/>
+              <a:t>залогировать</a:t>
+            </a:r>
+            <a:r>
+              <a:rPr lang="ru-RU" sz="1200" dirty="0"/>
+              <a:t> проблему и, при необходимости, включить механизмы повторных попыток или компенсационных действий. На диаграмме такие сценарии изображают через альтернативные блоки (</a:t>
+            </a:r>
+            <a:r>
+              <a:rPr lang="ru-RU" sz="1200" dirty="0" err="1"/>
+              <a:t>alt</a:t>
+            </a:r>
+            <a:r>
+              <a:rPr lang="ru-RU" sz="1200" dirty="0"/>
+              <a:t>/</a:t>
+            </a:r>
+            <a:r>
+              <a:rPr lang="ru-RU" sz="1200" dirty="0" err="1"/>
+              <a:t>opt</a:t>
+            </a:r>
+            <a:r>
+              <a:rPr lang="ru-RU" sz="1200" dirty="0"/>
+              <a:t>) или отдельные ветки ошибок.</a:t>
+            </a:r>
+          </a:p>
+        </p:txBody>
+      </p:sp>
+    </p:spTree>
+    <p:extLst>
+      <p:ext uri="{BB962C8B-B14F-4D97-AF65-F5344CB8AC3E}">
+        <p14:creationId xmlns:p14="http://schemas.microsoft.com/office/powerpoint/2010/main" val="1930614458"/>
+      </p:ext>
+    </p:extLst>
   </p:cSld>
   <p:clrMapOvr>
     <a:masterClrMapping/>
